--- a/@Materi Kuliah/Materi_Matematika_Aktuaria_2/Presentasi_Matematika_Aktuaria_2_Profesional_dari_HTML.pptx
+++ b/@Materi Kuliah/Materi_Matematika_Aktuaria_2/Presentasi_Matematika_Aktuaria_2_Profesional_dari_HTML.pptx
@@ -2,131 +2,36 @@
 <file path=ppt/presentation.xml><?xml version="1.0" encoding="utf-8"?>
 <p:presentation xmlns:p="http://schemas.openxmlformats.org/presentationml/2006/main">
   <p:sldMasterIdLst>
-    <p:sldMasterId xmlns:r="http://schemas.openxmlformats.org/officeDocument/2006/relationships" id="2147483648" r:id="Rd956ff2bbae248e2"/>
+    <p:sldMasterId xmlns:r="http://schemas.openxmlformats.org/officeDocument/2006/relationships" id="2147483648" r:id="Rc637511843be45b1"/>
   </p:sldMasterIdLst>
   <p:notesMasterIdLst>
-    <p:notesMasterId xmlns:r="http://schemas.openxmlformats.org/officeDocument/2006/relationships" r:id="R571cc307331c40c5"/>
+    <p:notesMasterId xmlns:r="http://schemas.openxmlformats.org/officeDocument/2006/relationships" r:id="Ra558f1382c7e42f1"/>
   </p:notesMasterIdLst>
   <p:sldIdLst>
-    <p:sldId xmlns:r="http://schemas.openxmlformats.org/officeDocument/2006/relationships" id="256" r:id="R81a62baead34411c"/>
-    <p:sldId xmlns:r="http://schemas.openxmlformats.org/officeDocument/2006/relationships" id="257" r:id="R5931e370f8b84351"/>
-    <p:sldId xmlns:r="http://schemas.openxmlformats.org/officeDocument/2006/relationships" id="258" r:id="R425f5694898444f4"/>
-    <p:sldId xmlns:r="http://schemas.openxmlformats.org/officeDocument/2006/relationships" id="259" r:id="Rbec2805424e042f3"/>
-    <p:sldId xmlns:r="http://schemas.openxmlformats.org/officeDocument/2006/relationships" id="260" r:id="Rc6a9167889be400c"/>
-    <p:sldId xmlns:r="http://schemas.openxmlformats.org/officeDocument/2006/relationships" id="261" r:id="R6c5fa46c217c4b94"/>
-    <p:sldId xmlns:r="http://schemas.openxmlformats.org/officeDocument/2006/relationships" id="262" r:id="R70c1ec48b9b74e0d"/>
-    <p:sldId xmlns:r="http://schemas.openxmlformats.org/officeDocument/2006/relationships" id="263" r:id="Re9c22bbd8e5a44b2"/>
-    <p:sldId xmlns:r="http://schemas.openxmlformats.org/officeDocument/2006/relationships" id="264" r:id="Rf9e88515e39f4f11"/>
-    <p:sldId xmlns:r="http://schemas.openxmlformats.org/officeDocument/2006/relationships" id="265" r:id="R9d51a2c62a444c89"/>
-    <p:sldId xmlns:r="http://schemas.openxmlformats.org/officeDocument/2006/relationships" id="266" r:id="R223f210349dc4ef1"/>
-    <p:sldId xmlns:r="http://schemas.openxmlformats.org/officeDocument/2006/relationships" id="267" r:id="R7757d5ed9c554c7c"/>
-    <p:sldId xmlns:r="http://schemas.openxmlformats.org/officeDocument/2006/relationships" id="268" r:id="R02d2162aa4db4867"/>
-    <p:sldId xmlns:r="http://schemas.openxmlformats.org/officeDocument/2006/relationships" id="269" r:id="Raa1ed7c249d64838"/>
-    <p:sldId xmlns:r="http://schemas.openxmlformats.org/officeDocument/2006/relationships" id="270" r:id="Re064538f49d849ab"/>
-    <p:sldId xmlns:r="http://schemas.openxmlformats.org/officeDocument/2006/relationships" id="271" r:id="Rc7e97993f9d14fa0"/>
-    <p:sldId xmlns:r="http://schemas.openxmlformats.org/officeDocument/2006/relationships" id="272" r:id="Rd6a15d4dffef4d4a"/>
-    <p:sldId xmlns:r="http://schemas.openxmlformats.org/officeDocument/2006/relationships" id="273" r:id="R7baf9a3cb97548f2"/>
-    <p:sldId xmlns:r="http://schemas.openxmlformats.org/officeDocument/2006/relationships" id="274" r:id="Rac26f8ff7ae34554"/>
-    <p:sldId xmlns:r="http://schemas.openxmlformats.org/officeDocument/2006/relationships" id="275" r:id="R31c8ae9db8fd484e"/>
-    <p:sldId xmlns:r="http://schemas.openxmlformats.org/officeDocument/2006/relationships" id="276" r:id="R6b437cda6e344b77"/>
+    <p:sldId xmlns:r="http://schemas.openxmlformats.org/officeDocument/2006/relationships" id="256" r:id="Rec271569f81348bd"/>
+    <p:sldId xmlns:r="http://schemas.openxmlformats.org/officeDocument/2006/relationships" id="257" r:id="R1e386660e9d44e1e"/>
+    <p:sldId xmlns:r="http://schemas.openxmlformats.org/officeDocument/2006/relationships" id="258" r:id="Rafa2a74d37ca4a3c"/>
+    <p:sldId xmlns:r="http://schemas.openxmlformats.org/officeDocument/2006/relationships" id="259" r:id="Rbdcc58f5a8ee4b44"/>
+    <p:sldId xmlns:r="http://schemas.openxmlformats.org/officeDocument/2006/relationships" id="260" r:id="R4eb1fdd6004346cb"/>
+    <p:sldId xmlns:r="http://schemas.openxmlformats.org/officeDocument/2006/relationships" id="261" r:id="Rc348286ce34b43cf"/>
+    <p:sldId xmlns:r="http://schemas.openxmlformats.org/officeDocument/2006/relationships" id="262" r:id="R9b9f343259c3413c"/>
+    <p:sldId xmlns:r="http://schemas.openxmlformats.org/officeDocument/2006/relationships" id="263" r:id="R071d67eecaab47a0"/>
+    <p:sldId xmlns:r="http://schemas.openxmlformats.org/officeDocument/2006/relationships" id="264" r:id="Rcaaae6547d6447d0"/>
+    <p:sldId xmlns:r="http://schemas.openxmlformats.org/officeDocument/2006/relationships" id="265" r:id="Rdcd24040050e498b"/>
+    <p:sldId xmlns:r="http://schemas.openxmlformats.org/officeDocument/2006/relationships" id="266" r:id="R94874b89cb9a41b5"/>
+    <p:sldId xmlns:r="http://schemas.openxmlformats.org/officeDocument/2006/relationships" id="267" r:id="R0b161d3d28724091"/>
+    <p:sldId xmlns:r="http://schemas.openxmlformats.org/officeDocument/2006/relationships" id="268" r:id="R8e33450b170e4187"/>
+    <p:sldId xmlns:r="http://schemas.openxmlformats.org/officeDocument/2006/relationships" id="269" r:id="R935e42b7976f45bd"/>
+    <p:sldId xmlns:r="http://schemas.openxmlformats.org/officeDocument/2006/relationships" id="270" r:id="R4e577ea6a3394360"/>
+    <p:sldId xmlns:r="http://schemas.openxmlformats.org/officeDocument/2006/relationships" id="271" r:id="R3974c358a3074505"/>
+    <p:sldId xmlns:r="http://schemas.openxmlformats.org/officeDocument/2006/relationships" id="272" r:id="R18756eb332404cdf"/>
+    <p:sldId xmlns:r="http://schemas.openxmlformats.org/officeDocument/2006/relationships" id="273" r:id="Race26d5cf8854d07"/>
+    <p:sldId xmlns:r="http://schemas.openxmlformats.org/officeDocument/2006/relationships" id="274" r:id="R92d67de9b87a4723"/>
+    <p:sldId xmlns:r="http://schemas.openxmlformats.org/officeDocument/2006/relationships" id="275" r:id="Rc7d090e851d34342"/>
+    <p:sldId xmlns:r="http://schemas.openxmlformats.org/officeDocument/2006/relationships" id="276" r:id="Rb75c3d4bd8a04dd7"/>
   </p:sldIdLst>
   <p:sldSz cx="12192000" cy="6858000"/>
   <p:notesSz cx="6858000" cy="9144000"/>
-  <p:defaultTextStyle>
-    <a:defPPr xmlns:a="http://schemas.openxmlformats.org/drawingml/2006/main">
-      <a:defRPr lang="en-US"/>
-    </a:defPPr>
-    <a:lvl1pPr xmlns:a="http://schemas.openxmlformats.org/drawingml/2006/main" marL="0" indent="0" algn="l" defTabSz="914400">
-      <a:defRPr sz="1800" kern="1200">
-        <a:solidFill>
-          <a:schemeClr val="tx1"/>
-        </a:solidFill>
-        <a:latin typeface="+mn-lt"/>
-        <a:ea typeface="+mn-ea"/>
-        <a:cs typeface="+mn-cs"/>
-      </a:defRPr>
-    </a:lvl1pPr>
-    <a:lvl2pPr xmlns:a="http://schemas.openxmlformats.org/drawingml/2006/main" marL="457200" indent="0" algn="l" defTabSz="914400">
-      <a:defRPr sz="1800" kern="1200">
-        <a:solidFill>
-          <a:schemeClr val="tx1"/>
-        </a:solidFill>
-        <a:latin typeface="+mn-lt"/>
-        <a:ea typeface="+mn-ea"/>
-        <a:cs typeface="+mn-cs"/>
-      </a:defRPr>
-    </a:lvl2pPr>
-    <a:lvl3pPr xmlns:a="http://schemas.openxmlformats.org/drawingml/2006/main" marL="914400" indent="0" algn="l" defTabSz="914400">
-      <a:defRPr sz="1800" kern="1200">
-        <a:solidFill>
-          <a:schemeClr val="tx1"/>
-        </a:solidFill>
-        <a:latin typeface="+mn-lt"/>
-        <a:ea typeface="+mn-ea"/>
-        <a:cs typeface="+mn-cs"/>
-      </a:defRPr>
-    </a:lvl3pPr>
-    <a:lvl4pPr xmlns:a="http://schemas.openxmlformats.org/drawingml/2006/main" marL="1371600" indent="0" algn="l" defTabSz="914400">
-      <a:defRPr sz="1800" kern="1200">
-        <a:solidFill>
-          <a:schemeClr val="tx1"/>
-        </a:solidFill>
-        <a:latin typeface="+mn-lt"/>
-        <a:ea typeface="+mn-ea"/>
-        <a:cs typeface="+mn-cs"/>
-      </a:defRPr>
-    </a:lvl4pPr>
-    <a:lvl5pPr xmlns:a="http://schemas.openxmlformats.org/drawingml/2006/main" marL="1828800" indent="0" algn="l" defTabSz="914400">
-      <a:defRPr sz="1800" kern="1200">
-        <a:solidFill>
-          <a:schemeClr val="tx1"/>
-        </a:solidFill>
-        <a:latin typeface="+mn-lt"/>
-        <a:ea typeface="+mn-ea"/>
-        <a:cs typeface="+mn-cs"/>
-      </a:defRPr>
-    </a:lvl5pPr>
-    <a:lvl6pPr xmlns:a="http://schemas.openxmlformats.org/drawingml/2006/main" marL="2286000" indent="0" algn="l" defTabSz="914400">
-      <a:defRPr sz="1800" kern="1200">
-        <a:solidFill>
-          <a:schemeClr val="tx1"/>
-        </a:solidFill>
-        <a:latin typeface="+mn-lt"/>
-        <a:ea typeface="+mn-ea"/>
-        <a:cs typeface="+mn-cs"/>
-      </a:defRPr>
-    </a:lvl6pPr>
-    <a:lvl7pPr xmlns:a="http://schemas.openxmlformats.org/drawingml/2006/main" marL="2743200" indent="0" algn="l" defTabSz="914400">
-      <a:defRPr sz="1800" kern="1200">
-        <a:solidFill>
-          <a:schemeClr val="tx1"/>
-        </a:solidFill>
-        <a:latin typeface="+mn-lt"/>
-        <a:ea typeface="+mn-ea"/>
-        <a:cs typeface="+mn-cs"/>
-      </a:defRPr>
-    </a:lvl7pPr>
-    <a:lvl8pPr xmlns:a="http://schemas.openxmlformats.org/drawingml/2006/main" marL="3200400" indent="0" algn="l" defTabSz="914400">
-      <a:defRPr sz="1800" kern="1200">
-        <a:solidFill>
-          <a:schemeClr val="tx1"/>
-        </a:solidFill>
-        <a:latin typeface="+mn-lt"/>
-        <a:ea typeface="+mn-ea"/>
-        <a:cs typeface="+mn-cs"/>
-      </a:defRPr>
-    </a:lvl8pPr>
-    <a:lvl9pPr xmlns:a="http://schemas.openxmlformats.org/drawingml/2006/main" marL="3657600" indent="0" algn="l" defTabSz="914400">
-      <a:defRPr sz="1800" kern="1200">
-        <a:solidFill>
-          <a:schemeClr val="tx1"/>
-        </a:solidFill>
-        <a:latin typeface="+mn-lt"/>
-        <a:ea typeface="+mn-ea"/>
-        <a:cs typeface="+mn-cs"/>
-      </a:defRPr>
-    </a:lvl9pPr>
-  </p:defaultTextStyle>
 </p:presentation>
 </file>
 
@@ -1453,7 +1358,26 @@
         <p:txBody>
           <a:bodyPr xmlns:a="http://schemas.openxmlformats.org/drawingml/2006/main"/>
           <a:lstStyle xmlns:a="http://schemas.openxmlformats.org/drawingml/2006/main"/>
-          <a:p xmlns:a="http://schemas.openxmlformats.org/drawingml/2006/main"/>
+          <a:p xmlns:a="http://schemas.openxmlformats.org/drawingml/2006/main">
+            <a:r>
+              <a:t>[Sources]</a:t>
+            </a:r>
+          </a:p>
+          <a:p xmlns:a="http://schemas.openxmlformats.org/drawingml/2006/main">
+            <a:r>
+              <a:t>- RPS mata kuliah Revisi AI 2026, Program Studi S2 Statistika Terapan FMIPA Universitas Padjadjaran.</a:t>
+            </a:r>
+          </a:p>
+          <a:p xmlns:a="http://schemas.openxmlformats.org/drawingml/2006/main">
+            <a:r>
+              <a:t>[/Sources]</a:t>
+            </a:r>
+          </a:p>
+          <a:p xmlns:a="http://schemas.openxmlformats.org/drawingml/2006/main">
+            <a:r>
+              <a:t>Penutup: CPL tetap. AI adalah akselerator ketercapaian CPMK/Sub-CPMK, bukan pengganti penalaran statistika. Tekankan kewajiban prompt log ringkas, sumber, kode/notebook reproducible, validasi, dan audit trail.</a:t>
+            </a:r>
+          </a:p>
         </p:txBody>
       </p:sp>
       <p:sp>
@@ -2010,8 +1934,8 @@
   </p:cSld>
   <p:clrMap bg1="lt1" tx1="dk1" bg2="lt2" tx2="dk2" accent1="accent1" accent2="accent2" accent3="accent3" accent4="accent4" accent5="accent5" accent6="accent6" hlink="hlink" folHlink="folHlink"/>
   <p:sldLayoutIdLst>
-    <p:sldLayoutId xmlns:r="http://schemas.openxmlformats.org/officeDocument/2006/relationships" id="2147483649" r:id="Raf2da303b66247e5"/>
-    <p:sldLayoutId xmlns:r="http://schemas.openxmlformats.org/officeDocument/2006/relationships" id="2147483650" r:id="R6191b02c27b54f50"/>
+    <p:sldLayoutId xmlns:r="http://schemas.openxmlformats.org/officeDocument/2006/relationships" id="2147483649" r:id="R9ec1b63345c64615"/>
+    <p:sldLayoutId xmlns:r="http://schemas.openxmlformats.org/officeDocument/2006/relationships" id="2147483650" r:id="Ra9694a9753e74c39"/>
   </p:sldLayoutIdLst>
   <p:hf sldNum="0" hdr="0" ftr="0" dt="0"/>
   <p:txStyles>
@@ -2577,7 +2501,7 @@
           <p:nvPr/>
         </p:nvPicPr>
         <p:blipFill>
-          <a:blip xmlns:r="http://schemas.openxmlformats.org/officeDocument/2006/relationships" xmlns:a="http://schemas.openxmlformats.org/drawingml/2006/main" r:embed="R16c0c5c3ae71499d"/>
+          <a:blip xmlns:r="http://schemas.openxmlformats.org/officeDocument/2006/relationships" xmlns:a="http://schemas.openxmlformats.org/drawingml/2006/main" r:embed="Rbf92686667a84efa"/>
           <a:stretch xmlns:a="http://schemas.openxmlformats.org/drawingml/2006/main">
             <a:fillRect l="0" t="0" r="0" b="0"/>
           </a:stretch>
@@ -2723,7 +2647,7 @@
           <p:nvPr/>
         </p:nvPicPr>
         <p:blipFill>
-          <a:blip xmlns:r="http://schemas.openxmlformats.org/officeDocument/2006/relationships" xmlns:a="http://schemas.openxmlformats.org/drawingml/2006/main" r:embed="R2b79d1830e134bc1"/>
+          <a:blip xmlns:r="http://schemas.openxmlformats.org/officeDocument/2006/relationships" xmlns:a="http://schemas.openxmlformats.org/drawingml/2006/main" r:embed="Ra14b3c2cb38943ca"/>
           <a:stretch xmlns:a="http://schemas.openxmlformats.org/drawingml/2006/main">
             <a:fillRect l="0" t="0" r="0" b="0"/>
           </a:stretch>
@@ -3345,7 +3269,7 @@
           <p:nvPr/>
         </p:nvPicPr>
         <p:blipFill>
-          <a:blip xmlns:r="http://schemas.openxmlformats.org/officeDocument/2006/relationships" xmlns:a="http://schemas.openxmlformats.org/drawingml/2006/main" r:embed="Rdc5665147e344488"/>
+          <a:blip xmlns:r="http://schemas.openxmlformats.org/officeDocument/2006/relationships" xmlns:a="http://schemas.openxmlformats.org/drawingml/2006/main" r:embed="R389b87404a5a42f7"/>
           <a:stretch xmlns:a="http://schemas.openxmlformats.org/drawingml/2006/main">
             <a:fillRect l="0" t="0" r="0" b="0"/>
           </a:stretch>
@@ -5495,7 +5419,7 @@
           <p:nvPr/>
         </p:nvPicPr>
         <p:blipFill>
-          <a:blip xmlns:r="http://schemas.openxmlformats.org/officeDocument/2006/relationships" xmlns:a="http://schemas.openxmlformats.org/drawingml/2006/main" r:embed="R44d985187f7e4602"/>
+          <a:blip xmlns:r="http://schemas.openxmlformats.org/officeDocument/2006/relationships" xmlns:a="http://schemas.openxmlformats.org/drawingml/2006/main" r:embed="R85092dfdcdb143aa"/>
           <a:stretch xmlns:a="http://schemas.openxmlformats.org/drawingml/2006/main">
             <a:fillRect l="0" t="0" r="0" b="0"/>
           </a:stretch>
@@ -5774,7 +5698,7 @@
           <p:nvPr/>
         </p:nvPicPr>
         <p:blipFill>
-          <a:blip xmlns:r="http://schemas.openxmlformats.org/officeDocument/2006/relationships" xmlns:a="http://schemas.openxmlformats.org/drawingml/2006/main" r:embed="Rab9624f8feb24ba1"/>
+          <a:blip xmlns:r="http://schemas.openxmlformats.org/officeDocument/2006/relationships" xmlns:a="http://schemas.openxmlformats.org/drawingml/2006/main" r:embed="Rea65dbda189f4db8"/>
           <a:stretch xmlns:a="http://schemas.openxmlformats.org/drawingml/2006/main">
             <a:fillRect l="0" t="0" r="0" b="0"/>
           </a:stretch>
@@ -7308,7 +7232,7 @@
           <p:nvPr/>
         </p:nvPicPr>
         <p:blipFill>
-          <a:blip xmlns:r="http://schemas.openxmlformats.org/officeDocument/2006/relationships" xmlns:a="http://schemas.openxmlformats.org/drawingml/2006/main" r:embed="R747bff041981426c"/>
+          <a:blip xmlns:r="http://schemas.openxmlformats.org/officeDocument/2006/relationships" xmlns:a="http://schemas.openxmlformats.org/drawingml/2006/main" r:embed="Rb3118b009cb44f21"/>
           <a:stretch xmlns:a="http://schemas.openxmlformats.org/drawingml/2006/main">
             <a:fillRect l="0" t="0" r="0" b="0"/>
           </a:stretch>
@@ -8477,7 +8401,7 @@
           <p:nvPr/>
         </p:nvPicPr>
         <p:blipFill>
-          <a:blip xmlns:r="http://schemas.openxmlformats.org/officeDocument/2006/relationships" xmlns:a="http://schemas.openxmlformats.org/drawingml/2006/main" r:embed="Rce6ce11d2601476b"/>
+          <a:blip xmlns:r="http://schemas.openxmlformats.org/officeDocument/2006/relationships" xmlns:a="http://schemas.openxmlformats.org/drawingml/2006/main" r:embed="R150e1a0782b64891"/>
           <a:stretch xmlns:a="http://schemas.openxmlformats.org/drawingml/2006/main">
             <a:fillRect l="0" t="0" r="0" b="0"/>
           </a:stretch>
@@ -9704,7 +9628,7 @@
           <p:nvPr/>
         </p:nvPicPr>
         <p:blipFill>
-          <a:blip xmlns:r="http://schemas.openxmlformats.org/officeDocument/2006/relationships" xmlns:a="http://schemas.openxmlformats.org/drawingml/2006/main" r:embed="R5f835c578996455b"/>
+          <a:blip xmlns:r="http://schemas.openxmlformats.org/officeDocument/2006/relationships" xmlns:a="http://schemas.openxmlformats.org/drawingml/2006/main" r:embed="Rbc17e11522b84a6c"/>
           <a:stretch xmlns:a="http://schemas.openxmlformats.org/drawingml/2006/main">
             <a:fillRect l="0" t="0" r="0" b="0"/>
           </a:stretch>
@@ -10909,7 +10833,7 @@
           <p:nvPr/>
         </p:nvPicPr>
         <p:blipFill>
-          <a:blip xmlns:r="http://schemas.openxmlformats.org/officeDocument/2006/relationships" xmlns:a="http://schemas.openxmlformats.org/drawingml/2006/main" r:embed="R115cb1ed19d24a95"/>
+          <a:blip xmlns:r="http://schemas.openxmlformats.org/officeDocument/2006/relationships" xmlns:a="http://schemas.openxmlformats.org/drawingml/2006/main" r:embed="R87a542b609324aa7"/>
           <a:stretch xmlns:a="http://schemas.openxmlformats.org/drawingml/2006/main">
             <a:fillRect l="0" t="0" r="0" b="0"/>
           </a:stretch>
@@ -11188,7 +11112,7 @@
           <p:nvPr/>
         </p:nvPicPr>
         <p:blipFill>
-          <a:blip xmlns:r="http://schemas.openxmlformats.org/officeDocument/2006/relationships" xmlns:a="http://schemas.openxmlformats.org/drawingml/2006/main" r:embed="R72a813bbfddd4621"/>
+          <a:blip xmlns:r="http://schemas.openxmlformats.org/officeDocument/2006/relationships" xmlns:a="http://schemas.openxmlformats.org/drawingml/2006/main" r:embed="R6b75888648ee4a9a"/>
           <a:stretch xmlns:a="http://schemas.openxmlformats.org/drawingml/2006/main">
             <a:fillRect l="0" t="0" r="0" b="0"/>
           </a:stretch>
@@ -12733,7 +12657,7 @@
           <p:nvPr/>
         </p:nvPicPr>
         <p:blipFill>
-          <a:blip xmlns:r="http://schemas.openxmlformats.org/officeDocument/2006/relationships" xmlns:a="http://schemas.openxmlformats.org/drawingml/2006/main" r:embed="R12e5d99c3c184bd3"/>
+          <a:blip xmlns:r="http://schemas.openxmlformats.org/officeDocument/2006/relationships" xmlns:a="http://schemas.openxmlformats.org/drawingml/2006/main" r:embed="R02b5388fb2804211"/>
           <a:stretch xmlns:a="http://schemas.openxmlformats.org/drawingml/2006/main">
             <a:fillRect l="0" t="0" r="0" b="0"/>
           </a:stretch>
@@ -14750,7 +14674,7 @@
           <p:nvPr/>
         </p:nvPicPr>
         <p:blipFill>
-          <a:blip xmlns:r="http://schemas.openxmlformats.org/officeDocument/2006/relationships" xmlns:a="http://schemas.openxmlformats.org/drawingml/2006/main" r:embed="R922f0e94d6bf4aec"/>
+          <a:blip xmlns:r="http://schemas.openxmlformats.org/officeDocument/2006/relationships" xmlns:a="http://schemas.openxmlformats.org/drawingml/2006/main" r:embed="Re2bca4ad2fe24038"/>
           <a:stretch xmlns:a="http://schemas.openxmlformats.org/drawingml/2006/main">
             <a:fillRect l="0" t="0" r="0" b="0"/>
           </a:stretch>
@@ -15977,7 +15901,7 @@
           <p:nvPr/>
         </p:nvPicPr>
         <p:blipFill>
-          <a:blip xmlns:r="http://schemas.openxmlformats.org/officeDocument/2006/relationships" xmlns:a="http://schemas.openxmlformats.org/drawingml/2006/main" r:embed="R4ebf90a2fdf04f73"/>
+          <a:blip xmlns:r="http://schemas.openxmlformats.org/officeDocument/2006/relationships" xmlns:a="http://schemas.openxmlformats.org/drawingml/2006/main" r:embed="Rcba782f552cf46e1"/>
           <a:stretch xmlns:a="http://schemas.openxmlformats.org/drawingml/2006/main">
             <a:fillRect l="0" t="0" r="0" b="0"/>
           </a:stretch>
@@ -17118,7 +17042,7 @@
           <p:nvPr/>
         </p:nvPicPr>
         <p:blipFill>
-          <a:blip xmlns:r="http://schemas.openxmlformats.org/officeDocument/2006/relationships" xmlns:a="http://schemas.openxmlformats.org/drawingml/2006/main" r:embed="R5faff443994f420a"/>
+          <a:blip xmlns:r="http://schemas.openxmlformats.org/officeDocument/2006/relationships" xmlns:a="http://schemas.openxmlformats.org/drawingml/2006/main" r:embed="R5bf56f44063b4a8f"/>
           <a:stretch xmlns:a="http://schemas.openxmlformats.org/drawingml/2006/main">
             <a:fillRect l="0" t="0" r="0" b="0"/>
           </a:stretch>
@@ -18583,7 +18507,7 @@
           <p:nvPr/>
         </p:nvPicPr>
         <p:blipFill>
-          <a:blip xmlns:r="http://schemas.openxmlformats.org/officeDocument/2006/relationships" xmlns:a="http://schemas.openxmlformats.org/drawingml/2006/main" r:embed="Rcf52a76dc811469b"/>
+          <a:blip xmlns:r="http://schemas.openxmlformats.org/officeDocument/2006/relationships" xmlns:a="http://schemas.openxmlformats.org/drawingml/2006/main" r:embed="R6765eeb0004f4821"/>
           <a:stretch xmlns:a="http://schemas.openxmlformats.org/drawingml/2006/main">
             <a:fillRect l="0" t="0" r="0" b="0"/>
           </a:stretch>
@@ -18729,7 +18653,7 @@
           <p:nvPr/>
         </p:nvPicPr>
         <p:blipFill>
-          <a:blip xmlns:r="http://schemas.openxmlformats.org/officeDocument/2006/relationships" xmlns:a="http://schemas.openxmlformats.org/drawingml/2006/main" r:embed="R7768e83644454fa1"/>
+          <a:blip xmlns:r="http://schemas.openxmlformats.org/officeDocument/2006/relationships" xmlns:a="http://schemas.openxmlformats.org/drawingml/2006/main" r:embed="R1211d37debd2483f"/>
           <a:stretch xmlns:a="http://schemas.openxmlformats.org/drawingml/2006/main">
             <a:fillRect l="0" t="0" r="0" b="0"/>
           </a:stretch>
@@ -18833,7 +18757,7 @@
                 <a:ea typeface="Aptos Display"/>
                 <a:cs typeface="Aptos Display"/>
               </a:rPr>
-              <a:t>Dari data menuju</a:t>
+              <a:t>AI mempercepat proses,</a:t>
             </a:r>
           </a:p>
           <a:p xmlns:a="http://schemas.openxmlformats.org/drawingml/2006/main">
@@ -18849,7 +18773,7 @@
                 <a:ea typeface="Aptos Display"/>
                 <a:cs typeface="Aptos Display"/>
               </a:rPr>
-              <a:t>keputusan yang dapat diuji</a:t>
+              <a:t>penalaran tetap memimpin</a:t>
             </a:r>
           </a:p>
         </p:txBody>
@@ -18916,7 +18840,7 @@
         </p:spPr>
         <p:txBody>
           <a:bodyPr xmlns:a="http://schemas.openxmlformats.org/drawingml/2006/main" wrap="square" lIns="635" tIns="635" rIns="635" bIns="635" anchor="t">
-            <a:normAutofit fontScale="100000"/>
+            <a:normAutofit fontScale="93620"/>
           </a:bodyPr>
           <a:lstStyle xmlns:a="http://schemas.openxmlformats.org/drawingml/2006/main"/>
           <a:p xmlns:a="http://schemas.openxmlformats.org/drawingml/2006/main">
@@ -18932,7 +18856,7 @@
                 <a:ea typeface="Aptos"/>
                 <a:cs typeface="Aptos"/>
               </a:rPr>
-              <a:t>Matematika Aktuaria 2 menghubungkan teori, data, metode, validasi, dan komunikasi untuk menghasilkan keputusan yang sahih, dapat direplikasi, dan bertanggung jawab.</a:t>
+              <a:t>Matematika Aktuaria 2 memadukan teori, data, komputasi, validasi, dan komunikasi. AI mempercepat eksplorasi dan pemeriksaan awal; mahasiswa tetap memverifikasi asumsi, kode, hasil numerik, ketidakpastian, sumber, dan dampak sebelum mengambil keputusan.</a:t>
             </a:r>
           </a:p>
         </p:txBody>
@@ -19102,7 +19026,7 @@
           <p:nvPr/>
         </p:nvPicPr>
         <p:blipFill>
-          <a:blip xmlns:r="http://schemas.openxmlformats.org/officeDocument/2006/relationships" xmlns:a="http://schemas.openxmlformats.org/drawingml/2006/main" r:embed="Rfe3488a7e4a44738"/>
+          <a:blip xmlns:r="http://schemas.openxmlformats.org/officeDocument/2006/relationships" xmlns:a="http://schemas.openxmlformats.org/drawingml/2006/main" r:embed="Ref61045c345441f5"/>
           <a:stretch xmlns:a="http://schemas.openxmlformats.org/drawingml/2006/main">
             <a:fillRect l="0" t="0" r="0" b="0"/>
           </a:stretch>
@@ -20233,7 +20157,7 @@
           <p:nvPr/>
         </p:nvPicPr>
         <p:blipFill>
-          <a:blip xmlns:r="http://schemas.openxmlformats.org/officeDocument/2006/relationships" xmlns:a="http://schemas.openxmlformats.org/drawingml/2006/main" r:embed="R5374a86946a54271"/>
+          <a:blip xmlns:r="http://schemas.openxmlformats.org/officeDocument/2006/relationships" xmlns:a="http://schemas.openxmlformats.org/drawingml/2006/main" r:embed="Rdf2921da64e14084"/>
           <a:stretch xmlns:a="http://schemas.openxmlformats.org/drawingml/2006/main">
             <a:fillRect l="0" t="0" r="0" b="0"/>
           </a:stretch>
@@ -22337,7 +22261,7 @@
           <p:nvPr/>
         </p:nvPicPr>
         <p:blipFill>
-          <a:blip xmlns:r="http://schemas.openxmlformats.org/officeDocument/2006/relationships" xmlns:a="http://schemas.openxmlformats.org/drawingml/2006/main" r:embed="Rce1fc234adf4483c"/>
+          <a:blip xmlns:r="http://schemas.openxmlformats.org/officeDocument/2006/relationships" xmlns:a="http://schemas.openxmlformats.org/drawingml/2006/main" r:embed="R40c0a712136b446a"/>
           <a:stretch xmlns:a="http://schemas.openxmlformats.org/drawingml/2006/main">
             <a:fillRect l="0" t="0" r="0" b="0"/>
           </a:stretch>
@@ -23619,7 +23543,7 @@
           <p:nvPr/>
         </p:nvPicPr>
         <p:blipFill>
-          <a:blip xmlns:r="http://schemas.openxmlformats.org/officeDocument/2006/relationships" xmlns:a="http://schemas.openxmlformats.org/drawingml/2006/main" r:embed="R4664f6739d474184"/>
+          <a:blip xmlns:r="http://schemas.openxmlformats.org/officeDocument/2006/relationships" xmlns:a="http://schemas.openxmlformats.org/drawingml/2006/main" r:embed="Raef396bdfa0f4873"/>
           <a:stretch xmlns:a="http://schemas.openxmlformats.org/drawingml/2006/main">
             <a:fillRect l="0" t="0" r="0" b="0"/>
           </a:stretch>
@@ -23898,7 +23822,7 @@
           <p:nvPr/>
         </p:nvPicPr>
         <p:blipFill>
-          <a:blip xmlns:r="http://schemas.openxmlformats.org/officeDocument/2006/relationships" xmlns:a="http://schemas.openxmlformats.org/drawingml/2006/main" r:embed="Rb729ff477c2d45c8"/>
+          <a:blip xmlns:r="http://schemas.openxmlformats.org/officeDocument/2006/relationships" xmlns:a="http://schemas.openxmlformats.org/drawingml/2006/main" r:embed="R34c785da0eb74b07"/>
           <a:stretch xmlns:a="http://schemas.openxmlformats.org/drawingml/2006/main">
             <a:fillRect l="0" t="0" r="0" b="0"/>
           </a:stretch>
@@ -25978,7 +25902,7 @@
           <p:nvPr/>
         </p:nvPicPr>
         <p:blipFill>
-          <a:blip xmlns:r="http://schemas.openxmlformats.org/officeDocument/2006/relationships" xmlns:a="http://schemas.openxmlformats.org/drawingml/2006/main" r:embed="R234275f60b864ff2"/>
+          <a:blip xmlns:r="http://schemas.openxmlformats.org/officeDocument/2006/relationships" xmlns:a="http://schemas.openxmlformats.org/drawingml/2006/main" r:embed="R663b8f3d259240fd"/>
           <a:stretch xmlns:a="http://schemas.openxmlformats.org/drawingml/2006/main">
             <a:fillRect l="0" t="0" r="0" b="0"/>
           </a:stretch>
@@ -27391,7 +27315,7 @@
           <p:nvPr/>
         </p:nvPicPr>
         <p:blipFill>
-          <a:blip xmlns:r="http://schemas.openxmlformats.org/officeDocument/2006/relationships" xmlns:a="http://schemas.openxmlformats.org/drawingml/2006/main" r:embed="R2bc2eac85e644d60"/>
+          <a:blip xmlns:r="http://schemas.openxmlformats.org/officeDocument/2006/relationships" xmlns:a="http://schemas.openxmlformats.org/drawingml/2006/main" r:embed="R812ad5941b8e462d"/>
           <a:stretch xmlns:a="http://schemas.openxmlformats.org/drawingml/2006/main">
             <a:fillRect l="0" t="0" r="0" b="0"/>
           </a:stretch>
